--- a/NE-2521460-Viva-Presentation.pptx
+++ b/NE-2521460-Viva-Presentation.pptx
@@ -10837,6 +10837,16 @@
             </a:outerShdw>
           </a:effectLst>
         </p:spPr>
+        <p:txBody>
+          <a:bodyPr/>
+          <a:lstStyle/>
+          <a:p>
+            <a:r>
+              <a:rPr lang="en-US" dirty="0"/>
+              <a:t>]</a:t>
+            </a:r>
+          </a:p>
+        </p:txBody>
       </p:sp>
       <p:sp>
         <p:nvSpPr>
@@ -11024,13 +11034,13 @@
       </p:sp>
       <p:sp>
         <p:nvSpPr>
-          <p:cNvPr id="37" name="Shape 35"/>
-          <p:cNvSpPr/>
-          <p:nvPr/>
-        </p:nvSpPr>
-        <p:spPr>
-          <a:xfrm>
-            <a:off x="6382512" y="2743200"/>
+          <p:cNvPr id="41" name="Shape 39"/>
+          <p:cNvSpPr/>
+          <p:nvPr/>
+        </p:nvSpPr>
+        <p:spPr>
+          <a:xfrm>
+            <a:off x="6382512" y="2594356"/>
             <a:ext cx="128016" cy="128016"/>
           </a:xfrm>
           <a:prstGeom prst="ellipse">
@@ -11044,131 +11054,13 @@
       </p:sp>
       <p:sp>
         <p:nvSpPr>
-          <p:cNvPr id="38" name="Text 36"/>
-          <p:cNvSpPr/>
-          <p:nvPr/>
-        </p:nvSpPr>
-        <p:spPr>
-          <a:xfrm>
-            <a:off x="6565392" y="2706624"/>
-            <a:ext cx="2423160" cy="274320"/>
-          </a:xfrm>
-          <a:prstGeom prst="rect">
-            <a:avLst/>
-          </a:prstGeom>
-          <a:noFill/>
-          <a:ln/>
-        </p:spPr>
-        <p:txBody>
-          <a:bodyPr wrap="square" lIns="0" tIns="0" rIns="0" bIns="0" rtlCol="0" anchor="ctr"/>
-          <a:lstStyle/>
-          <a:p>
-            <a:pPr marL="0" indent="0">
-              <a:buNone/>
-            </a:pPr>
-            <a:r>
-              <a:rPr lang="en-US" sz="1200" dirty="0">
-                <a:solidFill>
-                  <a:srgbClr val="0F172A"/>
-                </a:solidFill>
-                <a:latin typeface="Calibri" pitchFamily="34" charset="0"/>
-                <a:ea typeface="Calibri" pitchFamily="34" charset="-122"/>
-                <a:cs typeface="Calibri" pitchFamily="34" charset="-120"/>
-              </a:rPr>
-              <a:t>CSV + live DB merge</a:t>
-            </a:r>
-            <a:endParaRPr lang="en-US" sz="1200" dirty="0"/>
-          </a:p>
-        </p:txBody>
-      </p:sp>
-      <p:sp>
-        <p:nvSpPr>
-          <p:cNvPr id="39" name="Shape 37"/>
-          <p:cNvSpPr/>
-          <p:nvPr/>
-        </p:nvSpPr>
-        <p:spPr>
-          <a:xfrm>
-            <a:off x="6382512" y="3310128"/>
-            <a:ext cx="128016" cy="128016"/>
-          </a:xfrm>
-          <a:prstGeom prst="ellipse">
-            <a:avLst/>
-          </a:prstGeom>
-          <a:solidFill>
-            <a:srgbClr val="E8670A"/>
-          </a:solidFill>
-          <a:ln/>
-        </p:spPr>
-      </p:sp>
-      <p:sp>
-        <p:nvSpPr>
-          <p:cNvPr id="40" name="Text 38"/>
-          <p:cNvSpPr/>
-          <p:nvPr/>
-        </p:nvSpPr>
-        <p:spPr>
-          <a:xfrm>
-            <a:off x="6565392" y="3273552"/>
-            <a:ext cx="2423160" cy="274320"/>
-          </a:xfrm>
-          <a:prstGeom prst="rect">
-            <a:avLst/>
-          </a:prstGeom>
-          <a:noFill/>
-          <a:ln/>
-        </p:spPr>
-        <p:txBody>
-          <a:bodyPr wrap="square" lIns="0" tIns="0" rIns="0" bIns="0" rtlCol="0" anchor="ctr"/>
-          <a:lstStyle/>
-          <a:p>
-            <a:pPr marL="0" indent="0">
-              <a:buNone/>
-            </a:pPr>
-            <a:r>
-              <a:rPr lang="en-US" sz="1200" dirty="0">
-                <a:solidFill>
-                  <a:srgbClr val="0F172A"/>
-                </a:solidFill>
-                <a:latin typeface="Calibri" pitchFamily="34" charset="0"/>
-                <a:ea typeface="Calibri" pitchFamily="34" charset="-122"/>
-                <a:cs typeface="Calibri" pitchFamily="34" charset="-120"/>
-              </a:rPr>
-              <a:t>Admin retrain endpoint</a:t>
-            </a:r>
-            <a:endParaRPr lang="en-US" sz="1200" dirty="0"/>
-          </a:p>
-        </p:txBody>
-      </p:sp>
-      <p:sp>
-        <p:nvSpPr>
-          <p:cNvPr id="41" name="Shape 39"/>
-          <p:cNvSpPr/>
-          <p:nvPr/>
-        </p:nvSpPr>
-        <p:spPr>
-          <a:xfrm>
-            <a:off x="6382512" y="3877056"/>
-            <a:ext cx="128016" cy="128016"/>
-          </a:xfrm>
-          <a:prstGeom prst="ellipse">
-            <a:avLst/>
-          </a:prstGeom>
-          <a:solidFill>
-            <a:srgbClr val="E8670A"/>
-          </a:solidFill>
-          <a:ln/>
-        </p:spPr>
-      </p:sp>
-      <p:sp>
-        <p:nvSpPr>
           <p:cNvPr id="42" name="Text 40"/>
           <p:cNvSpPr/>
           <p:nvPr/>
         </p:nvSpPr>
         <p:spPr>
           <a:xfrm>
-            <a:off x="6565392" y="3840480"/>
+            <a:off x="6565392" y="2557780"/>
             <a:ext cx="2423160" cy="274320"/>
           </a:xfrm>
           <a:prstGeom prst="rect">
